--- a/ゲーム科1年/00_前期/ゲームプログラミングⅠ/12_矩形と点の当たり判定.pptx
+++ b/ゲーム科1年/00_前期/ゲームプログラミングⅠ/12_矩形と点の当たり判定.pptx
@@ -12,7 +12,6 @@
     <p:sldId id="263" r:id="rId6"/>
     <p:sldId id="260" r:id="rId7"/>
     <p:sldId id="261" r:id="rId8"/>
-    <p:sldId id="262" r:id="rId9"/>
   </p:sldIdLst>
   <p:sldSz cx="12192000" cy="6858000"/>
   <p:notesSz cx="6858000" cy="9144000"/>
@@ -266,7 +265,7 @@
           <a:p>
             <a:fld id="{E9CC885B-4903-4D54-9A93-00025F12DED9}" type="datetimeFigureOut">
               <a:rPr kumimoji="1" lang="ja-JP" altLang="en-US" smtClean="0"/>
-              <a:t>2024/12/4</a:t>
+              <a:t>2025/1/6</a:t>
             </a:fld>
             <a:endParaRPr kumimoji="1" lang="ja-JP" altLang="en-US"/>
           </a:p>
@@ -496,7 +495,7 @@
           <a:p>
             <a:fld id="{E9CC885B-4903-4D54-9A93-00025F12DED9}" type="datetimeFigureOut">
               <a:rPr kumimoji="1" lang="ja-JP" altLang="en-US" smtClean="0"/>
-              <a:t>2024/12/4</a:t>
+              <a:t>2025/1/6</a:t>
             </a:fld>
             <a:endParaRPr kumimoji="1" lang="ja-JP" altLang="en-US"/>
           </a:p>
@@ -736,7 +735,7 @@
           <a:p>
             <a:fld id="{E9CC885B-4903-4D54-9A93-00025F12DED9}" type="datetimeFigureOut">
               <a:rPr kumimoji="1" lang="ja-JP" altLang="en-US" smtClean="0"/>
-              <a:t>2024/12/4</a:t>
+              <a:t>2025/1/6</a:t>
             </a:fld>
             <a:endParaRPr kumimoji="1" lang="ja-JP" altLang="en-US"/>
           </a:p>
@@ -966,7 +965,7 @@
           <a:p>
             <a:fld id="{E9CC885B-4903-4D54-9A93-00025F12DED9}" type="datetimeFigureOut">
               <a:rPr kumimoji="1" lang="ja-JP" altLang="en-US" smtClean="0"/>
-              <a:t>2024/12/4</a:t>
+              <a:t>2025/1/6</a:t>
             </a:fld>
             <a:endParaRPr kumimoji="1" lang="ja-JP" altLang="en-US"/>
           </a:p>
@@ -1241,7 +1240,7 @@
           <a:p>
             <a:fld id="{E9CC885B-4903-4D54-9A93-00025F12DED9}" type="datetimeFigureOut">
               <a:rPr kumimoji="1" lang="ja-JP" altLang="en-US" smtClean="0"/>
-              <a:t>2024/12/4</a:t>
+              <a:t>2025/1/6</a:t>
             </a:fld>
             <a:endParaRPr kumimoji="1" lang="ja-JP" altLang="en-US"/>
           </a:p>
@@ -1570,7 +1569,7 @@
           <a:p>
             <a:fld id="{E9CC885B-4903-4D54-9A93-00025F12DED9}" type="datetimeFigureOut">
               <a:rPr kumimoji="1" lang="ja-JP" altLang="en-US" smtClean="0"/>
-              <a:t>2024/12/4</a:t>
+              <a:t>2025/1/6</a:t>
             </a:fld>
             <a:endParaRPr kumimoji="1" lang="ja-JP" altLang="en-US"/>
           </a:p>
@@ -2046,7 +2045,7 @@
           <a:p>
             <a:fld id="{E9CC885B-4903-4D54-9A93-00025F12DED9}" type="datetimeFigureOut">
               <a:rPr kumimoji="1" lang="ja-JP" altLang="en-US" smtClean="0"/>
-              <a:t>2024/12/4</a:t>
+              <a:t>2025/1/6</a:t>
             </a:fld>
             <a:endParaRPr kumimoji="1" lang="ja-JP" altLang="en-US"/>
           </a:p>
@@ -2187,7 +2186,7 @@
           <a:p>
             <a:fld id="{E9CC885B-4903-4D54-9A93-00025F12DED9}" type="datetimeFigureOut">
               <a:rPr kumimoji="1" lang="ja-JP" altLang="en-US" smtClean="0"/>
-              <a:t>2024/12/4</a:t>
+              <a:t>2025/1/6</a:t>
             </a:fld>
             <a:endParaRPr kumimoji="1" lang="ja-JP" altLang="en-US"/>
           </a:p>
@@ -2300,7 +2299,7 @@
           <a:p>
             <a:fld id="{E9CC885B-4903-4D54-9A93-00025F12DED9}" type="datetimeFigureOut">
               <a:rPr kumimoji="1" lang="ja-JP" altLang="en-US" smtClean="0"/>
-              <a:t>2024/12/4</a:t>
+              <a:t>2025/1/6</a:t>
             </a:fld>
             <a:endParaRPr kumimoji="1" lang="ja-JP" altLang="en-US"/>
           </a:p>
@@ -2643,7 +2642,7 @@
           <a:p>
             <a:fld id="{E9CC885B-4903-4D54-9A93-00025F12DED9}" type="datetimeFigureOut">
               <a:rPr kumimoji="1" lang="ja-JP" altLang="en-US" smtClean="0"/>
-              <a:t>2024/12/4</a:t>
+              <a:t>2025/1/6</a:t>
             </a:fld>
             <a:endParaRPr kumimoji="1" lang="ja-JP" altLang="en-US"/>
           </a:p>
@@ -2931,7 +2930,7 @@
           <a:p>
             <a:fld id="{E9CC885B-4903-4D54-9A93-00025F12DED9}" type="datetimeFigureOut">
               <a:rPr kumimoji="1" lang="ja-JP" altLang="en-US" smtClean="0"/>
-              <a:t>2024/12/4</a:t>
+              <a:t>2025/1/6</a:t>
             </a:fld>
             <a:endParaRPr kumimoji="1" lang="ja-JP" altLang="en-US"/>
           </a:p>
@@ -3204,7 +3203,7 @@
           <a:p>
             <a:fld id="{E9CC885B-4903-4D54-9A93-00025F12DED9}" type="datetimeFigureOut">
               <a:rPr kumimoji="1" lang="ja-JP" altLang="en-US" smtClean="0"/>
-              <a:t>2024/12/4</a:t>
+              <a:t>2025/1/6</a:t>
             </a:fld>
             <a:endParaRPr kumimoji="1" lang="ja-JP" altLang="en-US"/>
           </a:p>
@@ -4965,265 +4964,6 @@
 </p:sld>
 </file>
 
-<file path=ppt/slides/slide8.xml><?xml version="1.0" encoding="utf-8"?>
-<p:sld xmlns:a="http://schemas.openxmlformats.org/drawingml/2006/main" xmlns:r="http://schemas.openxmlformats.org/officeDocument/2006/relationships" xmlns:p="http://schemas.openxmlformats.org/presentationml/2006/main">
-  <p:cSld>
-    <p:spTree>
-      <p:nvGrpSpPr>
-        <p:cNvPr id="1" name=""/>
-        <p:cNvGrpSpPr/>
-        <p:nvPr/>
-      </p:nvGrpSpPr>
-      <p:grpSpPr>
-        <a:xfrm>
-          <a:off x="0" y="0"/>
-          <a:ext cx="0" cy="0"/>
-          <a:chOff x="0" y="0"/>
-          <a:chExt cx="0" cy="0"/>
-        </a:xfrm>
-      </p:grpSpPr>
-      <p:sp>
-        <p:nvSpPr>
-          <p:cNvPr id="4" name="テキスト ボックス 3">
-            <a:extLst>
-              <a:ext uri="{FF2B5EF4-FFF2-40B4-BE49-F238E27FC236}">
-                <a16:creationId xmlns:a16="http://schemas.microsoft.com/office/drawing/2014/main" id="{5A13BF46-B8C5-48AA-8308-C9ECFF431A18}"/>
-              </a:ext>
-            </a:extLst>
-          </p:cNvPr>
-          <p:cNvSpPr txBox="1"/>
-          <p:nvPr/>
-        </p:nvSpPr>
-        <p:spPr>
-          <a:xfrm>
-            <a:off x="567542" y="491954"/>
-            <a:ext cx="5226111" cy="584775"/>
-          </a:xfrm>
-          <a:prstGeom prst="rect">
-            <a:avLst/>
-          </a:prstGeom>
-          <a:noFill/>
-        </p:spPr>
-        <p:txBody>
-          <a:bodyPr wrap="none" rtlCol="0">
-            <a:spAutoFit/>
-          </a:bodyPr>
-          <a:lstStyle/>
-          <a:p>
-            <a:r>
-              <a:rPr kumimoji="1" lang="ja-JP" altLang="en-US" sz="3200" b="1" u="sng" dirty="0"/>
-              <a:t>矩形と点の当たり判定 課題</a:t>
-            </a:r>
-          </a:p>
-        </p:txBody>
-      </p:sp>
-      <p:sp>
-        <p:nvSpPr>
-          <p:cNvPr id="6" name="テキスト ボックス 5">
-            <a:extLst>
-              <a:ext uri="{FF2B5EF4-FFF2-40B4-BE49-F238E27FC236}">
-                <a16:creationId xmlns:a16="http://schemas.microsoft.com/office/drawing/2014/main" id="{55830AD6-028B-4C4E-80BF-B70DFC1C3A46}"/>
-              </a:ext>
-            </a:extLst>
-          </p:cNvPr>
-          <p:cNvSpPr txBox="1"/>
-          <p:nvPr/>
-        </p:nvSpPr>
-        <p:spPr>
-          <a:xfrm>
-            <a:off x="567542" y="1216429"/>
-            <a:ext cx="9979014" cy="1200329"/>
-          </a:xfrm>
-          <a:prstGeom prst="rect">
-            <a:avLst/>
-          </a:prstGeom>
-          <a:noFill/>
-        </p:spPr>
-        <p:txBody>
-          <a:bodyPr wrap="none" rtlCol="0">
-            <a:spAutoFit/>
-          </a:bodyPr>
-          <a:lstStyle/>
-          <a:p>
-            <a:r>
-              <a:rPr kumimoji="1" lang="en-US" altLang="ja-JP" sz="2400" b="1" dirty="0">
-                <a:solidFill>
-                  <a:srgbClr val="FF0000"/>
-                </a:solidFill>
-              </a:rPr>
-              <a:t>Player</a:t>
-            </a:r>
-            <a:r>
-              <a:rPr kumimoji="1" lang="ja-JP" altLang="en-US" sz="2400" b="1" dirty="0">
-                <a:solidFill>
-                  <a:srgbClr val="FF0000"/>
-                </a:solidFill>
-              </a:rPr>
-              <a:t>を参考に、</a:t>
-            </a:r>
-            <a:r>
-              <a:rPr kumimoji="1" lang="en-US" altLang="ja-JP" sz="2400" b="1" dirty="0" err="1">
-                <a:solidFill>
-                  <a:srgbClr val="FF0000"/>
-                </a:solidFill>
-              </a:rPr>
-              <a:t>BlueEnemy</a:t>
-            </a:r>
-            <a:r>
-              <a:rPr lang="ja-JP" altLang="en-US" sz="2400" b="1" dirty="0">
-                <a:solidFill>
-                  <a:srgbClr val="FF0000"/>
-                </a:solidFill>
-              </a:rPr>
-              <a:t>の情報を</a:t>
-            </a:r>
-            <a:r>
-              <a:rPr lang="en-US" altLang="ja-JP" sz="2400" b="1" dirty="0" err="1">
-                <a:solidFill>
-                  <a:srgbClr val="FF0000"/>
-                </a:solidFill>
-              </a:rPr>
-              <a:t>CheckCollision</a:t>
-            </a:r>
-            <a:r>
-              <a:rPr lang="ja-JP" altLang="en-US" sz="2400" b="1" dirty="0">
-                <a:solidFill>
-                  <a:srgbClr val="FF0000"/>
-                </a:solidFill>
-              </a:rPr>
-              <a:t>関数で取得</a:t>
-            </a:r>
-            <a:r>
-              <a:rPr lang="ja-JP" altLang="en-US" sz="2400" dirty="0"/>
-              <a:t>し、</a:t>
-            </a:r>
-            <a:endParaRPr lang="en-US" altLang="ja-JP" sz="2400" dirty="0"/>
-          </a:p>
-          <a:p>
-            <a:r>
-              <a:rPr kumimoji="1" lang="en-US" altLang="ja-JP" sz="2400" dirty="0" err="1"/>
-              <a:t>BlueEnemy</a:t>
-            </a:r>
-            <a:r>
-              <a:rPr kumimoji="1" lang="ja-JP" altLang="en-US" sz="2400" dirty="0"/>
-              <a:t>とマウスポインタの当たり判定を取りましょう。</a:t>
-            </a:r>
-            <a:endParaRPr kumimoji="1" lang="en-US" altLang="ja-JP" sz="2400" dirty="0"/>
-          </a:p>
-          <a:p>
-            <a:r>
-              <a:rPr kumimoji="1" lang="ja-JP" altLang="en-US" sz="2400" dirty="0"/>
-              <a:t>当たったら、</a:t>
-            </a:r>
-            <a:r>
-              <a:rPr kumimoji="1" lang="en-US" altLang="ja-JP" sz="2400" dirty="0"/>
-              <a:t>Player</a:t>
-            </a:r>
-            <a:r>
-              <a:rPr kumimoji="1" lang="ja-JP" altLang="en-US" sz="2400" dirty="0"/>
-              <a:t>と同様に当たった旨の文字を描画しましょう。</a:t>
-            </a:r>
-            <a:endParaRPr kumimoji="1" lang="en-US" altLang="ja-JP" sz="2400" dirty="0"/>
-          </a:p>
-        </p:txBody>
-      </p:sp>
-      <p:pic>
-        <p:nvPicPr>
-          <p:cNvPr id="3" name="図 2">
-            <a:extLst>
-              <a:ext uri="{FF2B5EF4-FFF2-40B4-BE49-F238E27FC236}">
-                <a16:creationId xmlns:a16="http://schemas.microsoft.com/office/drawing/2014/main" id="{A19E06A3-AEB3-4A3F-911B-981B81C7868F}"/>
-              </a:ext>
-            </a:extLst>
-          </p:cNvPr>
-          <p:cNvPicPr>
-            <a:picLocks noChangeAspect="1"/>
-          </p:cNvPicPr>
-          <p:nvPr/>
-        </p:nvPicPr>
-        <p:blipFill>
-          <a:blip r:embed="rId2"/>
-          <a:stretch>
-            <a:fillRect/>
-          </a:stretch>
-        </p:blipFill>
-        <p:spPr>
-          <a:xfrm>
-            <a:off x="567542" y="2556458"/>
-            <a:ext cx="3665791" cy="3805518"/>
-          </a:xfrm>
-          <a:prstGeom prst="rect">
-            <a:avLst/>
-          </a:prstGeom>
-        </p:spPr>
-      </p:pic>
-      <p:sp>
-        <p:nvSpPr>
-          <p:cNvPr id="5" name="矢印: 下 4">
-            <a:extLst>
-              <a:ext uri="{FF2B5EF4-FFF2-40B4-BE49-F238E27FC236}">
-                <a16:creationId xmlns:a16="http://schemas.microsoft.com/office/drawing/2014/main" id="{DB5D8667-D6D5-4B5C-A219-C2A3F7BEBB55}"/>
-              </a:ext>
-            </a:extLst>
-          </p:cNvPr>
-          <p:cNvSpPr/>
-          <p:nvPr/>
-        </p:nvSpPr>
-        <p:spPr>
-          <a:xfrm rot="8602307">
-            <a:off x="2458653" y="5669531"/>
-            <a:ext cx="177800" cy="254000"/>
-          </a:xfrm>
-          <a:prstGeom prst="downArrow">
-            <a:avLst/>
-          </a:prstGeom>
-          <a:solidFill>
-            <a:schemeClr val="bg1"/>
-          </a:solidFill>
-          <a:ln>
-            <a:solidFill>
-              <a:schemeClr val="tx1"/>
-            </a:solidFill>
-          </a:ln>
-        </p:spPr>
-        <p:style>
-          <a:lnRef idx="2">
-            <a:schemeClr val="accent1">
-              <a:shade val="50000"/>
-            </a:schemeClr>
-          </a:lnRef>
-          <a:fillRef idx="1">
-            <a:schemeClr val="accent1"/>
-          </a:fillRef>
-          <a:effectRef idx="0">
-            <a:schemeClr val="accent1"/>
-          </a:effectRef>
-          <a:fontRef idx="minor">
-            <a:schemeClr val="lt1"/>
-          </a:fontRef>
-        </p:style>
-        <p:txBody>
-          <a:bodyPr rtlCol="0" anchor="ctr"/>
-          <a:lstStyle/>
-          <a:p>
-            <a:pPr algn="ctr"/>
-            <a:endParaRPr kumimoji="1" lang="ja-JP" altLang="en-US"/>
-          </a:p>
-        </p:txBody>
-      </p:sp>
-    </p:spTree>
-    <p:extLst>
-      <p:ext uri="{BB962C8B-B14F-4D97-AF65-F5344CB8AC3E}">
-        <p14:creationId xmlns:p14="http://schemas.microsoft.com/office/powerpoint/2010/main" val="3696219093"/>
-      </p:ext>
-    </p:extLst>
-  </p:cSld>
-  <p:clrMapOvr>
-    <a:masterClrMapping/>
-  </p:clrMapOvr>
-</p:sld>
-</file>
-
 <file path=ppt/theme/theme1.xml><?xml version="1.0" encoding="utf-8"?>
 <a:theme xmlns:a="http://schemas.openxmlformats.org/drawingml/2006/main" name="Office テーマ">
   <a:themeElements>
